--- a/Презентация Финальная Версия Клыков.pptx
+++ b/Презентация Финальная Версия Клыков.pptx
@@ -5,7 +5,7 @@
     <p:sldMasterId id="2147483672" r:id="rId1"/>
   </p:sldMasterIdLst>
   <p:notesMasterIdLst>
-    <p:notesMasterId r:id="rId24"/>
+    <p:notesMasterId r:id="rId26"/>
   </p:notesMasterIdLst>
   <p:sldIdLst>
     <p:sldId id="256" r:id="rId2"/>
@@ -22,14 +22,16 @@
     <p:sldId id="267" r:id="rId13"/>
     <p:sldId id="268" r:id="rId14"/>
     <p:sldId id="269" r:id="rId15"/>
-    <p:sldId id="270" r:id="rId16"/>
-    <p:sldId id="271" r:id="rId17"/>
-    <p:sldId id="273" r:id="rId18"/>
-    <p:sldId id="272" r:id="rId19"/>
-    <p:sldId id="274" r:id="rId20"/>
-    <p:sldId id="275" r:id="rId21"/>
-    <p:sldId id="276" r:id="rId22"/>
-    <p:sldId id="277" r:id="rId23"/>
+    <p:sldId id="278" r:id="rId16"/>
+    <p:sldId id="270" r:id="rId17"/>
+    <p:sldId id="279" r:id="rId18"/>
+    <p:sldId id="271" r:id="rId19"/>
+    <p:sldId id="273" r:id="rId20"/>
+    <p:sldId id="272" r:id="rId21"/>
+    <p:sldId id="274" r:id="rId22"/>
+    <p:sldId id="275" r:id="rId23"/>
+    <p:sldId id="276" r:id="rId24"/>
+    <p:sldId id="277" r:id="rId25"/>
   </p:sldIdLst>
   <p:sldSz cx="12192000" cy="6858000"/>
   <p:notesSz cx="6858000" cy="9144000"/>
@@ -218,7 +220,7 @@
           <a:p>
             <a:fld id="{60AF0FC6-D54B-43DE-AFEC-1A5D1AFFC0A7}" type="datetimeFigureOut">
               <a:rPr lang="ru-RU" smtClean="0"/>
-              <a:t>06.05.2026</a:t>
+              <a:t>11.05.2026</a:t>
             </a:fld>
             <a:endParaRPr lang="ru-RU"/>
           </a:p>
@@ -724,7 +726,7 @@
           <a:p>
             <a:fld id="{C173D2E2-2307-4CAE-AE0F-A325FD4D4B38}" type="datetimeFigureOut">
               <a:rPr lang="ru-RU" smtClean="0"/>
-              <a:t>06.05.2026</a:t>
+              <a:t>11.05.2026</a:t>
             </a:fld>
             <a:endParaRPr lang="ru-RU"/>
           </a:p>
@@ -894,7 +896,7 @@
           <a:p>
             <a:fld id="{C173D2E2-2307-4CAE-AE0F-A325FD4D4B38}" type="datetimeFigureOut">
               <a:rPr lang="ru-RU" smtClean="0"/>
-              <a:t>06.05.2026</a:t>
+              <a:t>11.05.2026</a:t>
             </a:fld>
             <a:endParaRPr lang="ru-RU"/>
           </a:p>
@@ -1074,7 +1076,7 @@
           <a:p>
             <a:fld id="{C173D2E2-2307-4CAE-AE0F-A325FD4D4B38}" type="datetimeFigureOut">
               <a:rPr lang="ru-RU" smtClean="0"/>
-              <a:t>06.05.2026</a:t>
+              <a:t>11.05.2026</a:t>
             </a:fld>
             <a:endParaRPr lang="ru-RU"/>
           </a:p>
@@ -1244,7 +1246,7 @@
           <a:p>
             <a:fld id="{C173D2E2-2307-4CAE-AE0F-A325FD4D4B38}" type="datetimeFigureOut">
               <a:rPr lang="ru-RU" smtClean="0"/>
-              <a:t>06.05.2026</a:t>
+              <a:t>11.05.2026</a:t>
             </a:fld>
             <a:endParaRPr lang="ru-RU"/>
           </a:p>
@@ -1504,7 +1506,7 @@
           <a:p>
             <a:fld id="{C173D2E2-2307-4CAE-AE0F-A325FD4D4B38}" type="datetimeFigureOut">
               <a:rPr lang="ru-RU" smtClean="0"/>
-              <a:t>06.05.2026</a:t>
+              <a:t>11.05.2026</a:t>
             </a:fld>
             <a:endParaRPr lang="ru-RU"/>
           </a:p>
@@ -1736,7 +1738,7 @@
           <a:p>
             <a:fld id="{C173D2E2-2307-4CAE-AE0F-A325FD4D4B38}" type="datetimeFigureOut">
               <a:rPr lang="ru-RU" smtClean="0"/>
-              <a:t>06.05.2026</a:t>
+              <a:t>11.05.2026</a:t>
             </a:fld>
             <a:endParaRPr lang="ru-RU"/>
           </a:p>
@@ -2091,7 +2093,7 @@
           <a:p>
             <a:fld id="{C173D2E2-2307-4CAE-AE0F-A325FD4D4B38}" type="datetimeFigureOut">
               <a:rPr lang="ru-RU" smtClean="0"/>
-              <a:t>06.05.2026</a:t>
+              <a:t>11.05.2026</a:t>
             </a:fld>
             <a:endParaRPr lang="ru-RU"/>
           </a:p>
@@ -2232,7 +2234,7 @@
           <a:p>
             <a:fld id="{C173D2E2-2307-4CAE-AE0F-A325FD4D4B38}" type="datetimeFigureOut">
               <a:rPr lang="ru-RU" smtClean="0"/>
-              <a:t>06.05.2026</a:t>
+              <a:t>11.05.2026</a:t>
             </a:fld>
             <a:endParaRPr lang="ru-RU"/>
           </a:p>
@@ -2327,7 +2329,7 @@
           <a:p>
             <a:fld id="{C173D2E2-2307-4CAE-AE0F-A325FD4D4B38}" type="datetimeFigureOut">
               <a:rPr lang="ru-RU" smtClean="0"/>
-              <a:t>06.05.2026</a:t>
+              <a:t>11.05.2026</a:t>
             </a:fld>
             <a:endParaRPr lang="ru-RU"/>
           </a:p>
@@ -2684,7 +2686,7 @@
           <a:p>
             <a:fld id="{C173D2E2-2307-4CAE-AE0F-A325FD4D4B38}" type="datetimeFigureOut">
               <a:rPr lang="ru-RU" smtClean="0"/>
-              <a:t>06.05.2026</a:t>
+              <a:t>11.05.2026</a:t>
             </a:fld>
             <a:endParaRPr lang="ru-RU"/>
           </a:p>
@@ -3002,7 +3004,7 @@
           <a:p>
             <a:fld id="{C173D2E2-2307-4CAE-AE0F-A325FD4D4B38}" type="datetimeFigureOut">
               <a:rPr lang="ru-RU" smtClean="0"/>
-              <a:t>06.05.2026</a:t>
+              <a:t>11.05.2026</a:t>
             </a:fld>
             <a:endParaRPr lang="ru-RU"/>
           </a:p>
@@ -3246,7 +3248,7 @@
           <a:p>
             <a:fld id="{C173D2E2-2307-4CAE-AE0F-A325FD4D4B38}" type="datetimeFigureOut">
               <a:rPr lang="ru-RU" smtClean="0"/>
-              <a:t>06.05.2026</a:t>
+              <a:t>11.05.2026</a:t>
             </a:fld>
             <a:endParaRPr lang="ru-RU"/>
           </a:p>
@@ -4957,7 +4959,13 @@
   <p:cSld>
     <p:spTree>
       <p:nvGrpSpPr>
-        <p:cNvPr id="1" name=""/>
+        <p:cNvPr id="1" name="">
+          <a:extLst>
+            <a:ext uri="{FF2B5EF4-FFF2-40B4-BE49-F238E27FC236}">
+              <a16:creationId xmlns:a16="http://schemas.microsoft.com/office/drawing/2014/main" id="{08FFF620-B654-4FF4-AC04-C21E87E2AEEF}"/>
+            </a:ext>
+          </a:extLst>
+        </p:cNvPr>
         <p:cNvGrpSpPr/>
         <p:nvPr/>
       </p:nvGrpSpPr>
@@ -4971,7 +4979,13 @@
       </p:grpSpPr>
       <p:sp>
         <p:nvSpPr>
-          <p:cNvPr id="2" name="Заголовок 1"/>
+          <p:cNvPr id="2" name="Заголовок 1">
+            <a:extLst>
+              <a:ext uri="{FF2B5EF4-FFF2-40B4-BE49-F238E27FC236}">
+                <a16:creationId xmlns:a16="http://schemas.microsoft.com/office/drawing/2014/main" id="{B77FD04C-9B9C-77F6-9F98-10D6550A5E18}"/>
+              </a:ext>
+            </a:extLst>
+          </p:cNvPr>
           <p:cNvSpPr>
             <a:spLocks noGrp="1"/>
           </p:cNvSpPr>
@@ -4981,7 +4995,7 @@
         </p:nvSpPr>
         <p:spPr>
           <a:xfrm>
-            <a:off x="2231136" y="433469"/>
+            <a:off x="2231136" y="372509"/>
             <a:ext cx="7729728" cy="1188720"/>
           </a:xfrm>
         </p:spPr>
@@ -4991,17 +5005,17 @@
           <a:p>
             <a:r>
               <a:rPr lang="ru-RU" dirty="0"/>
-              <a:t>ЛОГИЧЕСКАЯ МОДЕЛЬ ДАННЫХ</a:t>
+              <a:t>Концептуальная модель данных</a:t>
             </a:r>
           </a:p>
         </p:txBody>
       </p:sp>
       <p:pic>
         <p:nvPicPr>
-          <p:cNvPr id="7" name="Объект 6">
+          <p:cNvPr id="6" name="Объект 5">
             <a:extLst>
               <a:ext uri="{FF2B5EF4-FFF2-40B4-BE49-F238E27FC236}">
-                <a16:creationId xmlns:a16="http://schemas.microsoft.com/office/drawing/2014/main" id="{B0D810ED-3DCC-CD0B-C0EA-9A48B1BDA8EC}"/>
+                <a16:creationId xmlns:a16="http://schemas.microsoft.com/office/drawing/2014/main" id="{5D651C70-7077-701C-E0F2-679150145D76}"/>
               </a:ext>
             </a:extLst>
           </p:cNvPr>
@@ -5020,8 +5034,8 @@
         </p:blipFill>
         <p:spPr>
           <a:xfrm>
-            <a:off x="2319469" y="1838465"/>
-            <a:ext cx="7549955" cy="4695794"/>
+            <a:off x="3173646" y="1635122"/>
+            <a:ext cx="5844707" cy="5104005"/>
           </a:xfrm>
           <a:prstGeom prst="rect">
             <a:avLst/>
@@ -5031,7 +5045,7 @@
     </p:spTree>
     <p:extLst>
       <p:ext uri="{BB962C8B-B14F-4D97-AF65-F5344CB8AC3E}">
-        <p14:creationId xmlns:p14="http://schemas.microsoft.com/office/powerpoint/2010/main" val="1435294816"/>
+        <p14:creationId xmlns:p14="http://schemas.microsoft.com/office/powerpoint/2010/main" val="936959692"/>
       </p:ext>
     </p:extLst>
   </p:cSld>
@@ -5070,7 +5084,7 @@
         </p:nvSpPr>
         <p:spPr>
           <a:xfrm>
-            <a:off x="2231135" y="578294"/>
+            <a:off x="2231136" y="433469"/>
             <a:ext cx="7729728" cy="1188720"/>
           </a:xfrm>
         </p:spPr>
@@ -5080,56 +5094,26 @@
           <a:p>
             <a:r>
               <a:rPr lang="ru-RU" dirty="0"/>
-              <a:t>АНАЛИТИЧЕСКИЕ ЗАПРОСЫ К БАЗЕ ДАННЫХ</a:t>
-            </a:r>
-          </a:p>
-        </p:txBody>
-      </p:sp>
-      <p:sp>
-        <p:nvSpPr>
-          <p:cNvPr id="3" name="Объект 2"/>
-          <p:cNvSpPr>
-            <a:spLocks noGrp="1"/>
-          </p:cNvSpPr>
-          <p:nvPr>
-            <p:ph idx="1"/>
-          </p:nvPr>
-        </p:nvSpPr>
-        <p:spPr>
-          <a:xfrm>
-            <a:off x="2231135" y="1927653"/>
-            <a:ext cx="7729728" cy="407315"/>
-          </a:xfrm>
-        </p:spPr>
-        <p:txBody>
-          <a:bodyPr>
-            <a:normAutofit/>
-          </a:bodyPr>
-          <a:lstStyle/>
-          <a:p>
-            <a:pPr marL="0" indent="0">
-              <a:buNone/>
-            </a:pPr>
-            <a:r>
-              <a:rPr lang="ru-RU" sz="2000" dirty="0"/>
-              <a:t>Фильтрация игрушек по типу и бюджету</a:t>
+              <a:t>ЛОГИЧЕСКАЯ МОДЕЛЬ ДАННЫХ</a:t>
             </a:r>
           </a:p>
         </p:txBody>
       </p:sp>
       <p:pic>
         <p:nvPicPr>
-          <p:cNvPr id="6" name="Рисунок 5">
+          <p:cNvPr id="7" name="Объект 6">
             <a:extLst>
               <a:ext uri="{FF2B5EF4-FFF2-40B4-BE49-F238E27FC236}">
-                <a16:creationId xmlns:a16="http://schemas.microsoft.com/office/drawing/2014/main" id="{870CD6F3-8AE4-5AF0-D67C-4056E3A25453}"/>
+                <a16:creationId xmlns:a16="http://schemas.microsoft.com/office/drawing/2014/main" id="{B0D810ED-3DCC-CD0B-C0EA-9A48B1BDA8EC}"/>
               </a:ext>
             </a:extLst>
           </p:cNvPr>
           <p:cNvPicPr>
-            <a:picLocks noChangeAspect="1"/>
+            <a:picLocks noGrp="1" noChangeAspect="1"/>
           </p:cNvPicPr>
-          <p:nvPr/>
+          <p:nvPr>
+            <p:ph idx="1"/>
+          </p:nvPr>
         </p:nvPicPr>
         <p:blipFill>
           <a:blip r:embed="rId2"/>
@@ -5139,8 +5123,8 @@
         </p:blipFill>
         <p:spPr>
           <a:xfrm>
-            <a:off x="1623822" y="2641911"/>
-            <a:ext cx="8944356" cy="3396591"/>
+            <a:off x="2319469" y="1838465"/>
+            <a:ext cx="7549955" cy="4695794"/>
           </a:xfrm>
           <a:prstGeom prst="rect">
             <a:avLst/>
@@ -5150,7 +5134,7 @@
     </p:spTree>
     <p:extLst>
       <p:ext uri="{BB962C8B-B14F-4D97-AF65-F5344CB8AC3E}">
-        <p14:creationId xmlns:p14="http://schemas.microsoft.com/office/powerpoint/2010/main" val="2160442015"/>
+        <p14:creationId xmlns:p14="http://schemas.microsoft.com/office/powerpoint/2010/main" val="1435294816"/>
       </p:ext>
     </p:extLst>
   </p:cSld>
@@ -5165,7 +5149,13 @@
   <p:cSld>
     <p:spTree>
       <p:nvGrpSpPr>
-        <p:cNvPr id="1" name=""/>
+        <p:cNvPr id="1" name="">
+          <a:extLst>
+            <a:ext uri="{FF2B5EF4-FFF2-40B4-BE49-F238E27FC236}">
+              <a16:creationId xmlns:a16="http://schemas.microsoft.com/office/drawing/2014/main" id="{7A77C54E-187A-C5CB-5D0B-7B1DD838DF5E}"/>
+            </a:ext>
+          </a:extLst>
+        </p:cNvPr>
         <p:cNvGrpSpPr/>
         <p:nvPr/>
       </p:nvGrpSpPr>
@@ -5179,7 +5169,13 @@
       </p:grpSpPr>
       <p:sp>
         <p:nvSpPr>
-          <p:cNvPr id="4" name="Заголовок 1"/>
+          <p:cNvPr id="2" name="Заголовок 1">
+            <a:extLst>
+              <a:ext uri="{FF2B5EF4-FFF2-40B4-BE49-F238E27FC236}">
+                <a16:creationId xmlns:a16="http://schemas.microsoft.com/office/drawing/2014/main" id="{D3F7ABCF-8C5A-AEA3-928A-572F90D66B5E}"/>
+              </a:ext>
+            </a:extLst>
+          </p:cNvPr>
           <p:cNvSpPr>
             <a:spLocks noGrp="1"/>
           </p:cNvSpPr>
@@ -5189,7 +5185,7 @@
         </p:nvSpPr>
         <p:spPr>
           <a:xfrm>
-            <a:off x="2231135" y="510436"/>
+            <a:off x="2231136" y="433469"/>
             <a:ext cx="7729728" cy="1188720"/>
           </a:xfrm>
         </p:spPr>
@@ -5199,56 +5195,26 @@
           <a:p>
             <a:r>
               <a:rPr lang="ru-RU" dirty="0"/>
-              <a:t>АНАЛИТИЧЕСКИЕ ЗАПРОСЫ К БАЗЕ ДАННЫХ</a:t>
-            </a:r>
-          </a:p>
-        </p:txBody>
-      </p:sp>
-      <p:sp>
-        <p:nvSpPr>
-          <p:cNvPr id="6" name="Объект 2"/>
-          <p:cNvSpPr>
-            <a:spLocks noGrp="1"/>
-          </p:cNvSpPr>
-          <p:nvPr>
-            <p:ph idx="1"/>
-          </p:nvPr>
-        </p:nvSpPr>
-        <p:spPr>
-          <a:xfrm>
-            <a:off x="2231135" y="1853514"/>
-            <a:ext cx="7729728" cy="531138"/>
-          </a:xfrm>
-        </p:spPr>
-        <p:txBody>
-          <a:bodyPr>
-            <a:normAutofit/>
-          </a:bodyPr>
-          <a:lstStyle/>
-          <a:p>
-            <a:pPr marL="0" indent="0">
-              <a:buNone/>
-            </a:pPr>
-            <a:r>
-              <a:rPr lang="ru-RU" sz="2000" dirty="0"/>
-              <a:t>Расчёт средней рыночной стоимости по категориям</a:t>
+              <a:t>Физическая модель данных</a:t>
             </a:r>
           </a:p>
         </p:txBody>
       </p:sp>
       <p:pic>
         <p:nvPicPr>
-          <p:cNvPr id="3" name="Рисунок 2">
+          <p:cNvPr id="6" name="Объект 5">
             <a:extLst>
               <a:ext uri="{FF2B5EF4-FFF2-40B4-BE49-F238E27FC236}">
-                <a16:creationId xmlns:a16="http://schemas.microsoft.com/office/drawing/2014/main" id="{F3D3A526-76AE-CCB2-53A8-D3D69681D7BD}"/>
+                <a16:creationId xmlns:a16="http://schemas.microsoft.com/office/drawing/2014/main" id="{8B46336C-F71F-12BE-321B-4003C974C1C3}"/>
               </a:ext>
             </a:extLst>
           </p:cNvPr>
           <p:cNvPicPr>
-            <a:picLocks noChangeAspect="1"/>
+            <a:picLocks noGrp="1" noChangeAspect="1"/>
           </p:cNvPicPr>
-          <p:nvPr/>
+          <p:nvPr>
+            <p:ph idx="1"/>
+          </p:nvPr>
         </p:nvPicPr>
         <p:blipFill>
           <a:blip r:embed="rId2"/>
@@ -5258,8 +5224,8 @@
         </p:blipFill>
         <p:spPr>
           <a:xfrm>
-            <a:off x="2055408" y="2384652"/>
-            <a:ext cx="8081183" cy="3960218"/>
+            <a:off x="1880634" y="1980548"/>
+            <a:ext cx="8430731" cy="4443983"/>
           </a:xfrm>
           <a:prstGeom prst="rect">
             <a:avLst/>
@@ -5269,7 +5235,7 @@
     </p:spTree>
     <p:extLst>
       <p:ext uri="{BB962C8B-B14F-4D97-AF65-F5344CB8AC3E}">
-        <p14:creationId xmlns:p14="http://schemas.microsoft.com/office/powerpoint/2010/main" val="1051267570"/>
+        <p14:creationId xmlns:p14="http://schemas.microsoft.com/office/powerpoint/2010/main" val="1629961856"/>
       </p:ext>
     </p:extLst>
   </p:cSld>
@@ -5298,6 +5264,33 @@
       </p:grpSpPr>
       <p:sp>
         <p:nvSpPr>
+          <p:cNvPr id="2" name="Заголовок 1"/>
+          <p:cNvSpPr>
+            <a:spLocks noGrp="1"/>
+          </p:cNvSpPr>
+          <p:nvPr>
+            <p:ph type="title"/>
+          </p:nvPr>
+        </p:nvSpPr>
+        <p:spPr>
+          <a:xfrm>
+            <a:off x="2231135" y="578294"/>
+            <a:ext cx="7729728" cy="1188720"/>
+          </a:xfrm>
+        </p:spPr>
+        <p:txBody>
+          <a:bodyPr/>
+          <a:lstStyle/>
+          <a:p>
+            <a:r>
+              <a:rPr lang="ru-RU" dirty="0"/>
+              <a:t>АНАЛИТИЧЕСКИЕ ЗАПРОСЫ К БАЗЕ ДАННЫХ</a:t>
+            </a:r>
+          </a:p>
+        </p:txBody>
+      </p:sp>
+      <p:sp>
+        <p:nvSpPr>
           <p:cNvPr id="3" name="Объект 2"/>
           <p:cNvSpPr>
             <a:spLocks noGrp="1"/>
@@ -5308,8 +5301,8 @@
         </p:nvSpPr>
         <p:spPr>
           <a:xfrm>
-            <a:off x="2231136" y="1969903"/>
-            <a:ext cx="7234397" cy="439665"/>
+            <a:off x="2231135" y="1927653"/>
+            <a:ext cx="7729728" cy="407315"/>
           </a:xfrm>
         </p:spPr>
         <p:txBody>
@@ -5323,52 +5316,17 @@
             </a:pPr>
             <a:r>
               <a:rPr lang="ru-RU" sz="2000" dirty="0"/>
-              <a:t>Проверка </a:t>
-            </a:r>
-            <a:r>
-              <a:rPr lang="ru-RU" sz="2000" dirty="0" err="1"/>
-              <a:t>заполненности</a:t>
-            </a:r>
-            <a:r>
-              <a:rPr lang="ru-RU" sz="2000" dirty="0"/>
-              <a:t> паспортных данных</a:t>
-            </a:r>
-          </a:p>
-        </p:txBody>
-      </p:sp>
-      <p:sp>
-        <p:nvSpPr>
-          <p:cNvPr id="4" name="Заголовок 1"/>
-          <p:cNvSpPr>
-            <a:spLocks noGrp="1"/>
-          </p:cNvSpPr>
-          <p:nvPr>
-            <p:ph type="title"/>
-          </p:nvPr>
-        </p:nvSpPr>
-        <p:spPr>
-          <a:xfrm>
-            <a:off x="2231136" y="615120"/>
-            <a:ext cx="7729728" cy="1188720"/>
-          </a:xfrm>
-        </p:spPr>
-        <p:txBody>
-          <a:bodyPr/>
-          <a:lstStyle/>
-          <a:p>
-            <a:r>
-              <a:rPr lang="ru-RU" dirty="0"/>
-              <a:t>Проверочные ЗАПРОСЫ К БАЗЕ ДАННЫХ</a:t>
+              <a:t>Фильтрация игрушек по типу и бюджету</a:t>
             </a:r>
           </a:p>
         </p:txBody>
       </p:sp>
       <p:pic>
         <p:nvPicPr>
-          <p:cNvPr id="7" name="Рисунок 6">
+          <p:cNvPr id="6" name="Рисунок 5">
             <a:extLst>
               <a:ext uri="{FF2B5EF4-FFF2-40B4-BE49-F238E27FC236}">
-                <a16:creationId xmlns:a16="http://schemas.microsoft.com/office/drawing/2014/main" id="{B19616C1-F431-A5ED-1BA3-1DDBE6C3C153}"/>
+                <a16:creationId xmlns:a16="http://schemas.microsoft.com/office/drawing/2014/main" id="{870CD6F3-8AE4-5AF0-D67C-4056E3A25453}"/>
               </a:ext>
             </a:extLst>
           </p:cNvPr>
@@ -5385,8 +5343,8 @@
         </p:blipFill>
         <p:spPr>
           <a:xfrm>
-            <a:off x="2628616" y="2552851"/>
-            <a:ext cx="6934767" cy="3791163"/>
+            <a:off x="1623822" y="2641911"/>
+            <a:ext cx="8944356" cy="3396591"/>
           </a:xfrm>
           <a:prstGeom prst="rect">
             <a:avLst/>
@@ -5396,7 +5354,7 @@
     </p:spTree>
     <p:extLst>
       <p:ext uri="{BB962C8B-B14F-4D97-AF65-F5344CB8AC3E}">
-        <p14:creationId xmlns:p14="http://schemas.microsoft.com/office/powerpoint/2010/main" val="3292762486"/>
+        <p14:creationId xmlns:p14="http://schemas.microsoft.com/office/powerpoint/2010/main" val="2160442015"/>
       </p:ext>
     </p:extLst>
   </p:cSld>
@@ -5425,7 +5383,7 @@
       </p:grpSpPr>
       <p:sp>
         <p:nvSpPr>
-          <p:cNvPr id="2" name="Заголовок 1"/>
+          <p:cNvPr id="4" name="Заголовок 1"/>
           <p:cNvSpPr>
             <a:spLocks noGrp="1"/>
           </p:cNvSpPr>
@@ -5435,7 +5393,7 @@
         </p:nvSpPr>
         <p:spPr>
           <a:xfrm>
-            <a:off x="2231136" y="424760"/>
+            <a:off x="2231135" y="510436"/>
             <a:ext cx="7729728" cy="1188720"/>
           </a:xfrm>
         </p:spPr>
@@ -5445,7 +5403,39 @@
           <a:p>
             <a:r>
               <a:rPr lang="ru-RU" dirty="0"/>
-              <a:t>ПОЛЬЗОВАТЕЛЬСКИЙ ИНТЕРФЕЙС</a:t>
+              <a:t>АНАЛИТИЧЕСКИЕ ЗАПРОСЫ К БАЗЕ ДАННЫХ</a:t>
+            </a:r>
+          </a:p>
+        </p:txBody>
+      </p:sp>
+      <p:sp>
+        <p:nvSpPr>
+          <p:cNvPr id="6" name="Объект 2"/>
+          <p:cNvSpPr>
+            <a:spLocks noGrp="1"/>
+          </p:cNvSpPr>
+          <p:nvPr>
+            <p:ph idx="1"/>
+          </p:nvPr>
+        </p:nvSpPr>
+        <p:spPr>
+          <a:xfrm>
+            <a:off x="2231135" y="1853514"/>
+            <a:ext cx="7729728" cy="531138"/>
+          </a:xfrm>
+        </p:spPr>
+        <p:txBody>
+          <a:bodyPr>
+            <a:normAutofit/>
+          </a:bodyPr>
+          <a:lstStyle/>
+          <a:p>
+            <a:pPr marL="0" indent="0">
+              <a:buNone/>
+            </a:pPr>
+            <a:r>
+              <a:rPr lang="ru-RU" sz="2000" dirty="0"/>
+              <a:t>Расчёт средней рыночной стоимости по категориям</a:t>
             </a:r>
           </a:p>
         </p:txBody>
@@ -5455,7 +5445,7 @@
           <p:cNvPr id="3" name="Рисунок 2">
             <a:extLst>
               <a:ext uri="{FF2B5EF4-FFF2-40B4-BE49-F238E27FC236}">
-                <a16:creationId xmlns:a16="http://schemas.microsoft.com/office/drawing/2014/main" id="{6DEAA885-6213-21CF-AB02-46FE44D1DC47}"/>
+                <a16:creationId xmlns:a16="http://schemas.microsoft.com/office/drawing/2014/main" id="{F3D3A526-76AE-CCB2-53A8-D3D69681D7BD}"/>
               </a:ext>
             </a:extLst>
           </p:cNvPr>
@@ -5465,21 +5455,15 @@
           <p:nvPr/>
         </p:nvPicPr>
         <p:blipFill>
-          <a:blip r:embed="rId2">
-            <a:extLst>
-              <a:ext uri="{28A0092B-C50C-407E-A947-70E740481C1C}">
-                <a14:useLocalDpi xmlns:a14="http://schemas.microsoft.com/office/drawing/2010/main" val="0"/>
-              </a:ext>
-            </a:extLst>
-          </a:blip>
+          <a:blip r:embed="rId2"/>
           <a:stretch>
             <a:fillRect/>
           </a:stretch>
         </p:blipFill>
         <p:spPr>
           <a:xfrm>
-            <a:off x="2231136" y="2023518"/>
-            <a:ext cx="7729727" cy="4182563"/>
+            <a:off x="2055408" y="2384652"/>
+            <a:ext cx="8081183" cy="3960218"/>
           </a:xfrm>
           <a:prstGeom prst="rect">
             <a:avLst/>
@@ -5489,7 +5473,7 @@
     </p:spTree>
     <p:extLst>
       <p:ext uri="{BB962C8B-B14F-4D97-AF65-F5344CB8AC3E}">
-        <p14:creationId xmlns:p14="http://schemas.microsoft.com/office/powerpoint/2010/main" val="1907778919"/>
+        <p14:creationId xmlns:p14="http://schemas.microsoft.com/office/powerpoint/2010/main" val="1051267570"/>
       </p:ext>
     </p:extLst>
   </p:cSld>
@@ -5647,6 +5631,46 @@
       </p:grpSpPr>
       <p:sp>
         <p:nvSpPr>
+          <p:cNvPr id="3" name="Объект 2"/>
+          <p:cNvSpPr>
+            <a:spLocks noGrp="1"/>
+          </p:cNvSpPr>
+          <p:nvPr>
+            <p:ph idx="1"/>
+          </p:nvPr>
+        </p:nvSpPr>
+        <p:spPr>
+          <a:xfrm>
+            <a:off x="2231136" y="1969903"/>
+            <a:ext cx="7234397" cy="439665"/>
+          </a:xfrm>
+        </p:spPr>
+        <p:txBody>
+          <a:bodyPr>
+            <a:normAutofit/>
+          </a:bodyPr>
+          <a:lstStyle/>
+          <a:p>
+            <a:pPr marL="0" indent="0">
+              <a:buNone/>
+            </a:pPr>
+            <a:r>
+              <a:rPr lang="ru-RU" sz="2000" dirty="0"/>
+              <a:t>Проверка </a:t>
+            </a:r>
+            <a:r>
+              <a:rPr lang="ru-RU" sz="2000" dirty="0" err="1"/>
+              <a:t>заполненности</a:t>
+            </a:r>
+            <a:r>
+              <a:rPr lang="ru-RU" sz="2000" dirty="0"/>
+              <a:t> паспортных данных</a:t>
+            </a:r>
+          </a:p>
+        </p:txBody>
+      </p:sp>
+      <p:sp>
+        <p:nvSpPr>
           <p:cNvPr id="4" name="Заголовок 1"/>
           <p:cNvSpPr>
             <a:spLocks noGrp="1"/>
@@ -5657,7 +5681,7 @@
         </p:nvSpPr>
         <p:spPr>
           <a:xfrm>
-            <a:off x="2231136" y="608700"/>
+            <a:off x="2231136" y="615120"/>
             <a:ext cx="7729728" cy="1188720"/>
           </a:xfrm>
         </p:spPr>
@@ -5667,17 +5691,17 @@
           <a:p>
             <a:r>
               <a:rPr lang="ru-RU" dirty="0"/>
-              <a:t>ПОЛЬЗОВАТЕЛЬСКИЙ ИНТЕРФЕЙС</a:t>
+              <a:t>Проверочные ЗАПРОСЫ К БАЗЕ ДАННЫХ</a:t>
             </a:r>
           </a:p>
         </p:txBody>
       </p:sp>
       <p:pic>
         <p:nvPicPr>
-          <p:cNvPr id="2" name="Рисунок 1">
+          <p:cNvPr id="7" name="Рисунок 6">
             <a:extLst>
               <a:ext uri="{FF2B5EF4-FFF2-40B4-BE49-F238E27FC236}">
-                <a16:creationId xmlns:a16="http://schemas.microsoft.com/office/drawing/2014/main" id="{673CFA52-47A5-B446-F465-8C3B43CC0F44}"/>
+                <a16:creationId xmlns:a16="http://schemas.microsoft.com/office/drawing/2014/main" id="{B19616C1-F431-A5ED-1BA3-1DDBE6C3C153}"/>
               </a:ext>
             </a:extLst>
           </p:cNvPr>
@@ -5694,38 +5718,8 @@
         </p:blipFill>
         <p:spPr>
           <a:xfrm>
-            <a:off x="192647" y="2530729"/>
-            <a:ext cx="5781818" cy="2745359"/>
-          </a:xfrm>
-          <a:prstGeom prst="rect">
-            <a:avLst/>
-          </a:prstGeom>
-        </p:spPr>
-      </p:pic>
-      <p:pic>
-        <p:nvPicPr>
-          <p:cNvPr id="8" name="Рисунок 7">
-            <a:extLst>
-              <a:ext uri="{FF2B5EF4-FFF2-40B4-BE49-F238E27FC236}">
-                <a16:creationId xmlns:a16="http://schemas.microsoft.com/office/drawing/2014/main" id="{B5DED688-0858-0678-7139-204B17413F17}"/>
-              </a:ext>
-            </a:extLst>
-          </p:cNvPr>
-          <p:cNvPicPr>
-            <a:picLocks noChangeAspect="1"/>
-          </p:cNvPicPr>
-          <p:nvPr/>
-        </p:nvPicPr>
-        <p:blipFill>
-          <a:blip r:embed="rId3"/>
-          <a:stretch>
-            <a:fillRect/>
-          </a:stretch>
-        </p:blipFill>
-        <p:spPr>
-          <a:xfrm>
-            <a:off x="6133071" y="2265934"/>
-            <a:ext cx="5940425" cy="4173220"/>
+            <a:off x="2628616" y="2552851"/>
+            <a:ext cx="6934767" cy="3791163"/>
           </a:xfrm>
           <a:prstGeom prst="rect">
             <a:avLst/>
@@ -5735,7 +5729,7 @@
     </p:spTree>
     <p:extLst>
       <p:ext uri="{BB962C8B-B14F-4D97-AF65-F5344CB8AC3E}">
-        <p14:creationId xmlns:p14="http://schemas.microsoft.com/office/powerpoint/2010/main" val="1509992199"/>
+        <p14:creationId xmlns:p14="http://schemas.microsoft.com/office/powerpoint/2010/main" val="3292762486"/>
       </p:ext>
     </p:extLst>
   </p:cSld>
@@ -5774,6 +5768,216 @@
         </p:nvSpPr>
         <p:spPr>
           <a:xfrm>
+            <a:off x="2231136" y="424760"/>
+            <a:ext cx="7729728" cy="1188720"/>
+          </a:xfrm>
+        </p:spPr>
+        <p:txBody>
+          <a:bodyPr/>
+          <a:lstStyle/>
+          <a:p>
+            <a:r>
+              <a:rPr lang="ru-RU" dirty="0"/>
+              <a:t>ПОЛЬЗОВАТЕЛЬСКИЙ ИНТЕРФЕЙС</a:t>
+            </a:r>
+          </a:p>
+        </p:txBody>
+      </p:sp>
+      <p:pic>
+        <p:nvPicPr>
+          <p:cNvPr id="3" name="Рисунок 2">
+            <a:extLst>
+              <a:ext uri="{FF2B5EF4-FFF2-40B4-BE49-F238E27FC236}">
+                <a16:creationId xmlns:a16="http://schemas.microsoft.com/office/drawing/2014/main" id="{6DEAA885-6213-21CF-AB02-46FE44D1DC47}"/>
+              </a:ext>
+            </a:extLst>
+          </p:cNvPr>
+          <p:cNvPicPr>
+            <a:picLocks noChangeAspect="1"/>
+          </p:cNvPicPr>
+          <p:nvPr/>
+        </p:nvPicPr>
+        <p:blipFill>
+          <a:blip r:embed="rId2">
+            <a:extLst>
+              <a:ext uri="{28A0092B-C50C-407E-A947-70E740481C1C}">
+                <a14:useLocalDpi xmlns:a14="http://schemas.microsoft.com/office/drawing/2010/main" val="0"/>
+              </a:ext>
+            </a:extLst>
+          </a:blip>
+          <a:stretch>
+            <a:fillRect/>
+          </a:stretch>
+        </p:blipFill>
+        <p:spPr>
+          <a:xfrm>
+            <a:off x="2231136" y="2023518"/>
+            <a:ext cx="7729727" cy="4182563"/>
+          </a:xfrm>
+          <a:prstGeom prst="rect">
+            <a:avLst/>
+          </a:prstGeom>
+        </p:spPr>
+      </p:pic>
+    </p:spTree>
+    <p:extLst>
+      <p:ext uri="{BB962C8B-B14F-4D97-AF65-F5344CB8AC3E}">
+        <p14:creationId xmlns:p14="http://schemas.microsoft.com/office/powerpoint/2010/main" val="1907778919"/>
+      </p:ext>
+    </p:extLst>
+  </p:cSld>
+  <p:clrMapOvr>
+    <a:masterClrMapping/>
+  </p:clrMapOvr>
+</p:sld>
+</file>
+
+<file path=ppt/slides/slide22.xml><?xml version="1.0" encoding="utf-8"?>
+<p:sld xmlns:a="http://schemas.openxmlformats.org/drawingml/2006/main" xmlns:r="http://schemas.openxmlformats.org/officeDocument/2006/relationships" xmlns:p="http://schemas.openxmlformats.org/presentationml/2006/main">
+  <p:cSld>
+    <p:spTree>
+      <p:nvGrpSpPr>
+        <p:cNvPr id="1" name=""/>
+        <p:cNvGrpSpPr/>
+        <p:nvPr/>
+      </p:nvGrpSpPr>
+      <p:grpSpPr>
+        <a:xfrm>
+          <a:off x="0" y="0"/>
+          <a:ext cx="0" cy="0"/>
+          <a:chOff x="0" y="0"/>
+          <a:chExt cx="0" cy="0"/>
+        </a:xfrm>
+      </p:grpSpPr>
+      <p:sp>
+        <p:nvSpPr>
+          <p:cNvPr id="4" name="Заголовок 1"/>
+          <p:cNvSpPr>
+            <a:spLocks noGrp="1"/>
+          </p:cNvSpPr>
+          <p:nvPr>
+            <p:ph type="title"/>
+          </p:nvPr>
+        </p:nvSpPr>
+        <p:spPr>
+          <a:xfrm>
+            <a:off x="2231136" y="608700"/>
+            <a:ext cx="7729728" cy="1188720"/>
+          </a:xfrm>
+        </p:spPr>
+        <p:txBody>
+          <a:bodyPr/>
+          <a:lstStyle/>
+          <a:p>
+            <a:r>
+              <a:rPr lang="ru-RU" dirty="0"/>
+              <a:t>ПОЛЬЗОВАТЕЛЬСКИЙ ИНТЕРФЕЙС</a:t>
+            </a:r>
+          </a:p>
+        </p:txBody>
+      </p:sp>
+      <p:pic>
+        <p:nvPicPr>
+          <p:cNvPr id="2" name="Рисунок 1">
+            <a:extLst>
+              <a:ext uri="{FF2B5EF4-FFF2-40B4-BE49-F238E27FC236}">
+                <a16:creationId xmlns:a16="http://schemas.microsoft.com/office/drawing/2014/main" id="{673CFA52-47A5-B446-F465-8C3B43CC0F44}"/>
+              </a:ext>
+            </a:extLst>
+          </p:cNvPr>
+          <p:cNvPicPr>
+            <a:picLocks noChangeAspect="1"/>
+          </p:cNvPicPr>
+          <p:nvPr/>
+        </p:nvPicPr>
+        <p:blipFill>
+          <a:blip r:embed="rId2"/>
+          <a:stretch>
+            <a:fillRect/>
+          </a:stretch>
+        </p:blipFill>
+        <p:spPr>
+          <a:xfrm>
+            <a:off x="192647" y="2530729"/>
+            <a:ext cx="5781818" cy="2745359"/>
+          </a:xfrm>
+          <a:prstGeom prst="rect">
+            <a:avLst/>
+          </a:prstGeom>
+        </p:spPr>
+      </p:pic>
+      <p:pic>
+        <p:nvPicPr>
+          <p:cNvPr id="8" name="Рисунок 7">
+            <a:extLst>
+              <a:ext uri="{FF2B5EF4-FFF2-40B4-BE49-F238E27FC236}">
+                <a16:creationId xmlns:a16="http://schemas.microsoft.com/office/drawing/2014/main" id="{B5DED688-0858-0678-7139-204B17413F17}"/>
+              </a:ext>
+            </a:extLst>
+          </p:cNvPr>
+          <p:cNvPicPr>
+            <a:picLocks noChangeAspect="1"/>
+          </p:cNvPicPr>
+          <p:nvPr/>
+        </p:nvPicPr>
+        <p:blipFill>
+          <a:blip r:embed="rId3"/>
+          <a:stretch>
+            <a:fillRect/>
+          </a:stretch>
+        </p:blipFill>
+        <p:spPr>
+          <a:xfrm>
+            <a:off x="6133071" y="2265934"/>
+            <a:ext cx="5940425" cy="4173220"/>
+          </a:xfrm>
+          <a:prstGeom prst="rect">
+            <a:avLst/>
+          </a:prstGeom>
+        </p:spPr>
+      </p:pic>
+    </p:spTree>
+    <p:extLst>
+      <p:ext uri="{BB962C8B-B14F-4D97-AF65-F5344CB8AC3E}">
+        <p14:creationId xmlns:p14="http://schemas.microsoft.com/office/powerpoint/2010/main" val="1509992199"/>
+      </p:ext>
+    </p:extLst>
+  </p:cSld>
+  <p:clrMapOvr>
+    <a:masterClrMapping/>
+  </p:clrMapOvr>
+</p:sld>
+</file>
+
+<file path=ppt/slides/slide23.xml><?xml version="1.0" encoding="utf-8"?>
+<p:sld xmlns:a="http://schemas.openxmlformats.org/drawingml/2006/main" xmlns:r="http://schemas.openxmlformats.org/officeDocument/2006/relationships" xmlns:p="http://schemas.openxmlformats.org/presentationml/2006/main">
+  <p:cSld>
+    <p:spTree>
+      <p:nvGrpSpPr>
+        <p:cNvPr id="1" name=""/>
+        <p:cNvGrpSpPr/>
+        <p:nvPr/>
+      </p:nvGrpSpPr>
+      <p:grpSpPr>
+        <a:xfrm>
+          <a:off x="0" y="0"/>
+          <a:ext cx="0" cy="0"/>
+          <a:chOff x="0" y="0"/>
+          <a:chExt cx="0" cy="0"/>
+        </a:xfrm>
+      </p:grpSpPr>
+      <p:sp>
+        <p:nvSpPr>
+          <p:cNvPr id="2" name="Заголовок 1"/>
+          <p:cNvSpPr>
+            <a:spLocks noGrp="1"/>
+          </p:cNvSpPr>
+          <p:nvPr>
+            <p:ph type="title"/>
+          </p:nvPr>
+        </p:nvSpPr>
+        <p:spPr>
+          <a:xfrm>
             <a:off x="2121984" y="458065"/>
             <a:ext cx="7729728" cy="1188720"/>
           </a:xfrm>
@@ -5853,7 +6057,7 @@
 </p:sld>
 </file>
 
-<file path=ppt/slides/slide22.xml><?xml version="1.0" encoding="utf-8"?>
+<file path=ppt/slides/slide24.xml><?xml version="1.0" encoding="utf-8"?>
 <p:sld xmlns:a="http://schemas.openxmlformats.org/drawingml/2006/main" xmlns:r="http://schemas.openxmlformats.org/officeDocument/2006/relationships" xmlns:p="http://schemas.openxmlformats.org/presentationml/2006/main">
   <p:cSld>
     <p:spTree>
